--- a/docs/presentation/file-3/slide-04-survey-finding.pptx
+++ b/docs/presentation/file-3/slide-04-survey-finding.pptx
@@ -943,11 +943,11 @@
         <p:spPr>
           <a:xfrm>
             <a:off x="1828800" y="1238250"/>
-            <a:ext cx="8534400" cy="1809750"/>
+            <a:ext cx="8534400" cy="1162050"/>
           </a:xfrm>
           <a:prstGeom prst="roundRect">
             <a:avLst>
-              <a:gd name="adj" fmla="val 1579"/>
+              <a:gd name="adj" fmla="val 2459"/>
             </a:avLst>
           </a:prstGeom>
           <a:solidFill>
@@ -965,7 +965,7 @@
         <p:spPr>
           <a:xfrm>
             <a:off x="1828800" y="1238250"/>
-            <a:ext cx="28575" cy="1809750"/>
+            <a:ext cx="28575" cy="1162050"/>
           </a:xfrm>
           <a:prstGeom prst="rect">
             <a:avLst/>
@@ -985,7 +985,7 @@
         <p:spPr>
           <a:xfrm>
             <a:off x="2057400" y="1428750"/>
-            <a:ext cx="8077200" cy="914400"/>
+            <a:ext cx="8077200" cy="361950"/>
           </a:xfrm>
           <a:prstGeom prst="rect">
             <a:avLst/>
@@ -1023,7 +1023,7 @@
         </p:nvSpPr>
         <p:spPr>
           <a:xfrm>
-            <a:off x="2335530" y="2381250"/>
+            <a:off x="2335530" y="1924050"/>
             <a:ext cx="1459382" cy="247650"/>
           </a:xfrm>
           <a:prstGeom prst="rect">
@@ -1062,7 +1062,7 @@
         </p:nvSpPr>
         <p:spPr>
           <a:xfrm>
-            <a:off x="3890162" y="2362200"/>
+            <a:off x="3890162" y="1905000"/>
             <a:ext cx="844906" cy="285750"/>
           </a:xfrm>
           <a:prstGeom prst="roundRect">
@@ -1089,7 +1089,7 @@
         </p:nvSpPr>
         <p:spPr>
           <a:xfrm>
-            <a:off x="3890162" y="2362200"/>
+            <a:off x="3890162" y="1905000"/>
             <a:ext cx="844906" cy="285750"/>
           </a:xfrm>
           <a:prstGeom prst="rect">
@@ -1128,7 +1128,7 @@
         </p:nvSpPr>
         <p:spPr>
           <a:xfrm>
-            <a:off x="4830318" y="2362200"/>
+            <a:off x="4830318" y="1905000"/>
             <a:ext cx="1097280" cy="285750"/>
           </a:xfrm>
           <a:prstGeom prst="roundRect">
@@ -1155,7 +1155,7 @@
         </p:nvSpPr>
         <p:spPr>
           <a:xfrm>
-            <a:off x="4830318" y="2362200"/>
+            <a:off x="4830318" y="1905000"/>
             <a:ext cx="1097280" cy="285750"/>
           </a:xfrm>
           <a:prstGeom prst="rect">
@@ -1194,7 +1194,7 @@
         </p:nvSpPr>
         <p:spPr>
           <a:xfrm>
-            <a:off x="6022848" y="2362200"/>
+            <a:off x="6022848" y="1905000"/>
             <a:ext cx="1013155" cy="285750"/>
           </a:xfrm>
           <a:prstGeom prst="roundRect">
@@ -1221,7 +1221,7 @@
         </p:nvSpPr>
         <p:spPr>
           <a:xfrm>
-            <a:off x="6022848" y="2362200"/>
+            <a:off x="6022848" y="1905000"/>
             <a:ext cx="1013155" cy="285750"/>
           </a:xfrm>
           <a:prstGeom prst="rect">
@@ -1260,7 +1260,7 @@
         </p:nvSpPr>
         <p:spPr>
           <a:xfrm>
-            <a:off x="7131253" y="2362200"/>
+            <a:off x="7131253" y="1905000"/>
             <a:ext cx="844906" cy="285750"/>
           </a:xfrm>
           <a:prstGeom prst="roundRect">
@@ -1287,7 +1287,7 @@
         </p:nvSpPr>
         <p:spPr>
           <a:xfrm>
-            <a:off x="7131253" y="2362200"/>
+            <a:off x="7131253" y="1905000"/>
             <a:ext cx="844906" cy="285750"/>
           </a:xfrm>
           <a:prstGeom prst="rect">
@@ -1326,7 +1326,7 @@
         </p:nvSpPr>
         <p:spPr>
           <a:xfrm>
-            <a:off x="8071409" y="2362200"/>
+            <a:off x="8071409" y="1905000"/>
             <a:ext cx="676656" cy="285750"/>
           </a:xfrm>
           <a:prstGeom prst="roundRect">
@@ -1353,7 +1353,7 @@
         </p:nvSpPr>
         <p:spPr>
           <a:xfrm>
-            <a:off x="8071409" y="2362200"/>
+            <a:off x="8071409" y="1905000"/>
             <a:ext cx="676656" cy="285750"/>
           </a:xfrm>
           <a:prstGeom prst="rect">
@@ -1392,7 +1392,7 @@
         </p:nvSpPr>
         <p:spPr>
           <a:xfrm>
-            <a:off x="8843315" y="2362200"/>
+            <a:off x="8843315" y="1905000"/>
             <a:ext cx="1013155" cy="285750"/>
           </a:xfrm>
           <a:prstGeom prst="roundRect">
@@ -1419,7 +1419,7 @@
         </p:nvSpPr>
         <p:spPr>
           <a:xfrm>
-            <a:off x="8843315" y="2362200"/>
+            <a:off x="8843315" y="1905000"/>
             <a:ext cx="1013155" cy="285750"/>
           </a:xfrm>
           <a:prstGeom prst="rect">
@@ -1465,7 +1465,7 @@
           </p:nvPr>
         </p:nvGraphicFramePr>
         <p:xfrm>
-          <a:off x="762000" y="3371850"/>
+          <a:off x="762000" y="2686050"/>
           <a:ext cx="10668000" cy="914400"/>
         </p:xfrm>
         <a:graphic>
@@ -1476,7 +1476,145 @@
                 <a:gridCol w="5334000"/>
                 <a:gridCol w="5334000"/>
               </a:tblGrid>
-              <a:tr h="533400">
+              <a:tr h="609600">
+                <a:tc>
+                  <a:txBody>
+                    <a:bodyPr/>
+                    <a:lstStyle/>
+                    <a:p>
+                      <a:pPr indent="0" marL="0">
+                        <a:buNone/>
+                      </a:pPr>
+                      <a:r>
+                        <a:rPr lang="en-US" sz="1700" b="1" dirty="0">
+                          <a:solidFill>
+                            <a:srgbClr val="5A1A1A"/>
+                          </a:solidFill>
+                          <a:latin typeface="Source Sans 3" pitchFamily="34" charset="0"/>
+                          <a:ea typeface="Source Sans 3" pitchFamily="34" charset="-122"/>
+                          <a:cs typeface="Source Sans 3" pitchFamily="34" charset="-120"/>
+                        </a:rPr>
+                        <a:t>Unstructured ReAct + GPT-4</a:t>
+                      </a:r>
+                      <a:endParaRPr lang="en-US" sz="1700" dirty="0">
+                        <a:latin typeface="Source Sans 3" charset="0"/>
+                        <a:ea typeface="Source Sans 3" charset="0"/>
+                        <a:cs typeface="Source Sans 3" charset="0"/>
+                      </a:endParaRPr>
+                    </a:p>
+                  </a:txBody>
+                  <a:tcPr marL="203200" marR="203200" marT="50800" marB="50800" anchor="ctr">
+                    <a:lnL w="38100" cap="flat" cmpd="sng" algn="ctr">
+                      <a:solidFill>
+                        <a:srgbClr val="F7F4EF"/>
+                      </a:solidFill>
+                      <a:prstDash val="solid"/>
+                      <a:round/>
+                      <a:headEnd type="none" w="med" len="med"/>
+                      <a:tailEnd type="none" w="med" len="med"/>
+                    </a:lnL>
+                    <a:lnR w="38100" cap="flat" cmpd="sng" algn="ctr">
+                      <a:solidFill>
+                        <a:srgbClr val="F7F4EF"/>
+                      </a:solidFill>
+                      <a:prstDash val="solid"/>
+                      <a:round/>
+                      <a:headEnd type="none" w="med" len="med"/>
+                      <a:tailEnd type="none" w="med" len="med"/>
+                    </a:lnR>
+                    <a:lnT w="38100" cap="flat" cmpd="sng" algn="ctr">
+                      <a:solidFill>
+                        <a:srgbClr val="F7F4EF"/>
+                      </a:solidFill>
+                      <a:prstDash val="solid"/>
+                      <a:round/>
+                      <a:headEnd type="none" w="med" len="med"/>
+                      <a:tailEnd type="none" w="med" len="med"/>
+                    </a:lnT>
+                    <a:lnB w="38100" cap="flat" cmpd="sng" algn="ctr">
+                      <a:solidFill>
+                        <a:srgbClr val="8B1A1A"/>
+                      </a:solidFill>
+                      <a:prstDash val="solid"/>
+                      <a:round/>
+                      <a:headEnd type="none" w="med" len="med"/>
+                      <a:tailEnd type="none" w="med" len="med"/>
+                    </a:lnB>
+                    <a:solidFill>
+                      <a:srgbClr val="F5D5D5"/>
+                    </a:solidFill>
+                  </a:tcPr>
+                </a:tc>
+                <a:tc>
+                  <a:txBody>
+                    <a:bodyPr/>
+                    <a:lstStyle/>
+                    <a:p>
+                      <a:pPr indent="0" marL="0">
+                        <a:buNone/>
+                      </a:pPr>
+                      <a:r>
+                        <a:rPr lang="en-US" sz="1700" b="1" dirty="0">
+                          <a:solidFill>
+                            <a:srgbClr val="1A4A28"/>
+                          </a:solidFill>
+                          <a:latin typeface="Source Sans 3" pitchFamily="34" charset="0"/>
+                          <a:ea typeface="Source Sans 3" pitchFamily="34" charset="-122"/>
+                          <a:cs typeface="Source Sans 3" pitchFamily="34" charset="-120"/>
+                        </a:rPr>
+                        <a:t>Structured Pipeline + GPT-4o-mini</a:t>
+                      </a:r>
+                      <a:endParaRPr lang="en-US" sz="1700" dirty="0">
+                        <a:latin typeface="Source Sans 3" charset="0"/>
+                        <a:ea typeface="Source Sans 3" charset="0"/>
+                        <a:cs typeface="Source Sans 3" charset="0"/>
+                      </a:endParaRPr>
+                    </a:p>
+                  </a:txBody>
+                  <a:tcPr marL="203200" marR="203200" marT="50800" marB="50800" anchor="ctr">
+                    <a:lnL w="38100" cap="flat" cmpd="sng" algn="ctr">
+                      <a:solidFill>
+                        <a:srgbClr val="F7F4EF"/>
+                      </a:solidFill>
+                      <a:prstDash val="solid"/>
+                      <a:round/>
+                      <a:headEnd type="none" w="med" len="med"/>
+                      <a:tailEnd type="none" w="med" len="med"/>
+                    </a:lnL>
+                    <a:lnR w="38100" cap="flat" cmpd="sng" algn="ctr">
+                      <a:solidFill>
+                        <a:srgbClr val="F7F4EF"/>
+                      </a:solidFill>
+                      <a:prstDash val="solid"/>
+                      <a:round/>
+                      <a:headEnd type="none" w="med" len="med"/>
+                      <a:tailEnd type="none" w="med" len="med"/>
+                    </a:lnR>
+                    <a:lnT w="38100" cap="flat" cmpd="sng" algn="ctr">
+                      <a:solidFill>
+                        <a:srgbClr val="F7F4EF"/>
+                      </a:solidFill>
+                      <a:prstDash val="solid"/>
+                      <a:round/>
+                      <a:headEnd type="none" w="med" len="med"/>
+                      <a:tailEnd type="none" w="med" len="med"/>
+                    </a:lnT>
+                    <a:lnB w="38100" cap="flat" cmpd="sng" algn="ctr">
+                      <a:solidFill>
+                        <a:srgbClr val="8B1A1A"/>
+                      </a:solidFill>
+                      <a:prstDash val="solid"/>
+                      <a:round/>
+                      <a:headEnd type="none" w="med" len="med"/>
+                      <a:tailEnd type="none" w="med" len="med"/>
+                    </a:lnB>
+                    <a:solidFill>
+                      <a:srgbClr val="D6EDDA"/>
+                    </a:solidFill>
+                  </a:tcPr>
+                </a:tc>
+              </a:tr>
+              <a:tr h="609600">
                 <a:tc>
                   <a:txBody>
                     <a:bodyPr/>
@@ -1494,7 +1632,7 @@
                           <a:ea typeface="Source Sans 3" pitchFamily="34" charset="-122"/>
                           <a:cs typeface="Source Sans 3" pitchFamily="34" charset="-120"/>
                         </a:rPr>
-                        <a:t>Unstructured ReAct + GPT-4</a:t>
+                        <a:t>✗  Depth-first tunnel vision</a:t>
                       </a:r>
                       <a:endParaRPr lang="en-US" sz="1500" dirty="0">
                         <a:latin typeface="Source Sans 3" charset="0"/>
@@ -1533,7 +1671,7 @@
                     </a:lnT>
                     <a:lnB w="38100" cap="flat" cmpd="sng" algn="ctr">
                       <a:solidFill>
-                        <a:srgbClr val="8B1A1A"/>
+                        <a:srgbClr val="F7F4EF"/>
                       </a:solidFill>
                       <a:prstDash val="solid"/>
                       <a:round/>
@@ -1562,7 +1700,7 @@
                           <a:ea typeface="Source Sans 3" pitchFamily="34" charset="-122"/>
                           <a:cs typeface="Source Sans 3" pitchFamily="34" charset="-120"/>
                         </a:rPr>
-                        <a:t>Structured Pipeline + GPT-4o-mini</a:t>
+                        <a:t>✓  Broad, structured exploration</a:t>
                       </a:r>
                       <a:endParaRPr lang="en-US" sz="1500" dirty="0">
                         <a:latin typeface="Source Sans 3" charset="0"/>
@@ -1601,7 +1739,7 @@
                     </a:lnT>
                     <a:lnB w="38100" cap="flat" cmpd="sng" algn="ctr">
                       <a:solidFill>
-                        <a:srgbClr val="8B1A1A"/>
+                        <a:srgbClr val="F7F4EF"/>
                       </a:solidFill>
                       <a:prstDash val="solid"/>
                       <a:round/>
@@ -1614,7 +1752,7 @@
                   </a:tcPr>
                 </a:tc>
               </a:tr>
-              <a:tr h="533400">
+              <a:tr h="609600">
                 <a:tc>
                   <a:txBody>
                     <a:bodyPr/>
@@ -1624,7 +1762,7 @@
                         <a:buNone/>
                       </a:pPr>
                       <a:r>
-                        <a:rPr lang="en-US" sz="1300" b="1" dirty="0">
+                        <a:rPr lang="en-US" sz="1500" b="1" dirty="0">
                           <a:solidFill>
                             <a:srgbClr val="5A1A1A"/>
                           </a:solidFill>
@@ -1632,9 +1770,9 @@
                           <a:ea typeface="Source Sans 3" pitchFamily="34" charset="-122"/>
                           <a:cs typeface="Source Sans 3" pitchFamily="34" charset="-120"/>
                         </a:rPr>
-                        <a:t>✗  Depth-first tunnel vision</a:t>
+                        <a:t>✗  Context loss in long sessions</a:t>
                       </a:r>
-                      <a:endParaRPr lang="en-US" sz="1300" dirty="0">
+                      <a:endParaRPr lang="en-US" sz="1500" dirty="0">
                         <a:latin typeface="Source Sans 3" charset="0"/>
                         <a:ea typeface="Source Sans 3" charset="0"/>
                         <a:cs typeface="Source Sans 3" charset="0"/>
@@ -1692,7 +1830,7 @@
                         <a:buNone/>
                       </a:pPr>
                       <a:r>
-                        <a:rPr lang="en-US" sz="1300" b="1" dirty="0">
+                        <a:rPr lang="en-US" sz="1500" b="1" dirty="0">
                           <a:solidFill>
                             <a:srgbClr val="1A4A28"/>
                           </a:solidFill>
@@ -1700,9 +1838,9 @@
                           <a:ea typeface="Source Sans 3" pitchFamily="34" charset="-122"/>
                           <a:cs typeface="Source Sans 3" pitchFamily="34" charset="-120"/>
                         </a:rPr>
-                        <a:t>✓  Broad, structured exploration</a:t>
+                        <a:t>✓  Scoped per-invocation context</a:t>
                       </a:r>
-                      <a:endParaRPr lang="en-US" sz="1300" dirty="0">
+                      <a:endParaRPr lang="en-US" sz="1500" dirty="0">
                         <a:latin typeface="Source Sans 3" charset="0"/>
                         <a:ea typeface="Source Sans 3" charset="0"/>
                         <a:cs typeface="Source Sans 3" charset="0"/>
@@ -1752,7 +1890,7 @@
                   </a:tcPr>
                 </a:tc>
               </a:tr>
-              <a:tr h="533400">
+              <a:tr h="609600">
                 <a:tc>
                   <a:txBody>
                     <a:bodyPr/>
@@ -1762,7 +1900,7 @@
                         <a:buNone/>
                       </a:pPr>
                       <a:r>
-                        <a:rPr lang="en-US" sz="1300" b="1" dirty="0">
+                        <a:rPr lang="en-US" sz="1500" b="1" dirty="0">
                           <a:solidFill>
                             <a:srgbClr val="5A1A1A"/>
                           </a:solidFill>
@@ -1770,9 +1908,9 @@
                           <a:ea typeface="Source Sans 3" pitchFamily="34" charset="-122"/>
                           <a:cs typeface="Source Sans 3" pitchFamily="34" charset="-120"/>
                         </a:rPr>
-                        <a:t>✗  Context loss in long sessions</a:t>
+                        <a:t>✗  No failure recovery</a:t>
                       </a:r>
-                      <a:endParaRPr lang="en-US" sz="1300" dirty="0">
+                      <a:endParaRPr lang="en-US" sz="1500" dirty="0">
                         <a:latin typeface="Source Sans 3" charset="0"/>
                         <a:ea typeface="Source Sans 3" charset="0"/>
                         <a:cs typeface="Source Sans 3" charset="0"/>
@@ -1830,7 +1968,7 @@
                         <a:buNone/>
                       </a:pPr>
                       <a:r>
-                        <a:rPr lang="en-US" sz="1300" b="1" dirty="0">
+                        <a:rPr lang="en-US" sz="1500" b="1" dirty="0">
                           <a:solidFill>
                             <a:srgbClr val="1A4A28"/>
                           </a:solidFill>
@@ -1838,9 +1976,9 @@
                           <a:ea typeface="Source Sans 3" pitchFamily="34" charset="-122"/>
                           <a:cs typeface="Source Sans 3" pitchFamily="34" charset="-120"/>
                         </a:rPr>
-                        <a:t>✓  Scoped per-invocation context</a:t>
+                        <a:t>✓  Retry / adapt / escalate loops</a:t>
                       </a:r>
-                      <a:endParaRPr lang="en-US" sz="1300" dirty="0">
+                      <a:endParaRPr lang="en-US" sz="1500" dirty="0">
                         <a:latin typeface="Source Sans 3" charset="0"/>
                         <a:ea typeface="Source Sans 3" charset="0"/>
                         <a:cs typeface="Source Sans 3" charset="0"/>
@@ -1890,7 +2028,7 @@
                   </a:tcPr>
                 </a:tc>
               </a:tr>
-              <a:tr h="533400">
+              <a:tr h="609600">
                 <a:tc>
                   <a:txBody>
                     <a:bodyPr/>
@@ -1900,7 +2038,7 @@
                         <a:buNone/>
                       </a:pPr>
                       <a:r>
-                        <a:rPr lang="en-US" sz="1300" b="1" dirty="0">
+                        <a:rPr lang="en-US" sz="1500" b="1" dirty="0">
                           <a:solidFill>
                             <a:srgbClr val="5A1A1A"/>
                           </a:solidFill>
@@ -1908,9 +2046,9 @@
                           <a:ea typeface="Source Sans 3" pitchFamily="34" charset="-122"/>
                           <a:cs typeface="Source Sans 3" pitchFamily="34" charset="-120"/>
                         </a:rPr>
-                        <a:t>✗  No failure recovery</a:t>
+                        <a:t>✗  Implicit planning only</a:t>
                       </a:r>
-                      <a:endParaRPr lang="en-US" sz="1300" dirty="0">
+                      <a:endParaRPr lang="en-US" sz="1500" dirty="0">
                         <a:latin typeface="Source Sans 3" charset="0"/>
                         <a:ea typeface="Source Sans 3" charset="0"/>
                         <a:cs typeface="Source Sans 3" charset="0"/>
@@ -1968,145 +2106,7 @@
                         <a:buNone/>
                       </a:pPr>
                       <a:r>
-                        <a:rPr lang="en-US" sz="1300" b="1" dirty="0">
-                          <a:solidFill>
-                            <a:srgbClr val="1A4A28"/>
-                          </a:solidFill>
-                          <a:latin typeface="Source Sans 3" pitchFamily="34" charset="0"/>
-                          <a:ea typeface="Source Sans 3" pitchFamily="34" charset="-122"/>
-                          <a:cs typeface="Source Sans 3" pitchFamily="34" charset="-120"/>
-                        </a:rPr>
-                        <a:t>✓  Retry / adapt / escalate loops</a:t>
-                      </a:r>
-                      <a:endParaRPr lang="en-US" sz="1300" dirty="0">
-                        <a:latin typeface="Source Sans 3" charset="0"/>
-                        <a:ea typeface="Source Sans 3" charset="0"/>
-                        <a:cs typeface="Source Sans 3" charset="0"/>
-                      </a:endParaRPr>
-                    </a:p>
-                  </a:txBody>
-                  <a:tcPr marL="203200" marR="203200" marT="50800" marB="50800" anchor="ctr">
-                    <a:lnL w="38100" cap="flat" cmpd="sng" algn="ctr">
-                      <a:solidFill>
-                        <a:srgbClr val="F7F4EF"/>
-                      </a:solidFill>
-                      <a:prstDash val="solid"/>
-                      <a:round/>
-                      <a:headEnd type="none" w="med" len="med"/>
-                      <a:tailEnd type="none" w="med" len="med"/>
-                    </a:lnL>
-                    <a:lnR w="38100" cap="flat" cmpd="sng" algn="ctr">
-                      <a:solidFill>
-                        <a:srgbClr val="F7F4EF"/>
-                      </a:solidFill>
-                      <a:prstDash val="solid"/>
-                      <a:round/>
-                      <a:headEnd type="none" w="med" len="med"/>
-                      <a:tailEnd type="none" w="med" len="med"/>
-                    </a:lnR>
-                    <a:lnT w="38100" cap="flat" cmpd="sng" algn="ctr">
-                      <a:solidFill>
-                        <a:srgbClr val="F7F4EF"/>
-                      </a:solidFill>
-                      <a:prstDash val="solid"/>
-                      <a:round/>
-                      <a:headEnd type="none" w="med" len="med"/>
-                      <a:tailEnd type="none" w="med" len="med"/>
-                    </a:lnT>
-                    <a:lnB w="38100" cap="flat" cmpd="sng" algn="ctr">
-                      <a:solidFill>
-                        <a:srgbClr val="F7F4EF"/>
-                      </a:solidFill>
-                      <a:prstDash val="solid"/>
-                      <a:round/>
-                      <a:headEnd type="none" w="med" len="med"/>
-                      <a:tailEnd type="none" w="med" len="med"/>
-                    </a:lnB>
-                    <a:solidFill>
-                      <a:srgbClr val="D6EDDA"/>
-                    </a:solidFill>
-                  </a:tcPr>
-                </a:tc>
-              </a:tr>
-              <a:tr h="533400">
-                <a:tc>
-                  <a:txBody>
-                    <a:bodyPr/>
-                    <a:lstStyle/>
-                    <a:p>
-                      <a:pPr indent="0" marL="0">
-                        <a:buNone/>
-                      </a:pPr>
-                      <a:r>
-                        <a:rPr lang="en-US" sz="1300" b="1" dirty="0">
-                          <a:solidFill>
-                            <a:srgbClr val="5A1A1A"/>
-                          </a:solidFill>
-                          <a:latin typeface="Source Sans 3" pitchFamily="34" charset="0"/>
-                          <a:ea typeface="Source Sans 3" pitchFamily="34" charset="-122"/>
-                          <a:cs typeface="Source Sans 3" pitchFamily="34" charset="-120"/>
-                        </a:rPr>
-                        <a:t>✗  Implicit planning only</a:t>
-                      </a:r>
-                      <a:endParaRPr lang="en-US" sz="1300" dirty="0">
-                        <a:latin typeface="Source Sans 3" charset="0"/>
-                        <a:ea typeface="Source Sans 3" charset="0"/>
-                        <a:cs typeface="Source Sans 3" charset="0"/>
-                      </a:endParaRPr>
-                    </a:p>
-                  </a:txBody>
-                  <a:tcPr marL="203200" marR="203200" marT="50800" marB="50800" anchor="ctr">
-                    <a:lnL w="38100" cap="flat" cmpd="sng" algn="ctr">
-                      <a:solidFill>
-                        <a:srgbClr val="F7F4EF"/>
-                      </a:solidFill>
-                      <a:prstDash val="solid"/>
-                      <a:round/>
-                      <a:headEnd type="none" w="med" len="med"/>
-                      <a:tailEnd type="none" w="med" len="med"/>
-                    </a:lnL>
-                    <a:lnR w="38100" cap="flat" cmpd="sng" algn="ctr">
-                      <a:solidFill>
-                        <a:srgbClr val="F7F4EF"/>
-                      </a:solidFill>
-                      <a:prstDash val="solid"/>
-                      <a:round/>
-                      <a:headEnd type="none" w="med" len="med"/>
-                      <a:tailEnd type="none" w="med" len="med"/>
-                    </a:lnR>
-                    <a:lnT w="38100" cap="flat" cmpd="sng" algn="ctr">
-                      <a:solidFill>
-                        <a:srgbClr val="F7F4EF"/>
-                      </a:solidFill>
-                      <a:prstDash val="solid"/>
-                      <a:round/>
-                      <a:headEnd type="none" w="med" len="med"/>
-                      <a:tailEnd type="none" w="med" len="med"/>
-                    </a:lnT>
-                    <a:lnB w="38100" cap="flat" cmpd="sng" algn="ctr">
-                      <a:solidFill>
-                        <a:srgbClr val="F7F4EF"/>
-                      </a:solidFill>
-                      <a:prstDash val="solid"/>
-                      <a:round/>
-                      <a:headEnd type="none" w="med" len="med"/>
-                      <a:tailEnd type="none" w="med" len="med"/>
-                    </a:lnB>
-                    <a:solidFill>
-                      <a:srgbClr val="F5D5D5"/>
-                    </a:solidFill>
-                  </a:tcPr>
-                </a:tc>
-                <a:tc>
-                  <a:txBody>
-                    <a:bodyPr/>
-                    <a:lstStyle/>
-                    <a:p>
-                      <a:pPr indent="0" marL="0">
-                        <a:buNone/>
-                      </a:pPr>
-                      <a:r>
-                        <a:rPr lang="en-US" sz="1300" b="1" dirty="0">
+                        <a:rPr lang="en-US" sz="1500" b="1" dirty="0">
                           <a:solidFill>
                             <a:srgbClr val="1A4A28"/>
                           </a:solidFill>
@@ -2116,7 +2116,7 @@
                         </a:rPr>
                         <a:t>✓  Explicit dependency modeling</a:t>
                       </a:r>
-                      <a:endParaRPr lang="en-US" sz="1300" dirty="0">
+                      <a:endParaRPr lang="en-US" sz="1500" dirty="0">
                         <a:latin typeface="Source Sans 3" charset="0"/>
                         <a:ea typeface="Source Sans 3" charset="0"/>
                         <a:cs typeface="Source Sans 3" charset="0"/>
@@ -2178,8 +2178,8 @@
         </p:nvSpPr>
         <p:spPr>
           <a:xfrm>
-            <a:off x="762000" y="6229350"/>
-            <a:ext cx="10668000" cy="190500"/>
+            <a:off x="762000" y="5924550"/>
+            <a:ext cx="10668000" cy="228600"/>
           </a:xfrm>
           <a:prstGeom prst="rect">
             <a:avLst/>
@@ -2195,7 +2195,7 @@
               <a:buNone/>
             </a:pPr>
             <a:r>
-              <a:rPr lang="en-US" sz="1050" b="1" spc="100" kern="0" dirty="0">
+              <a:rPr lang="en-US" sz="1400" b="1" spc="100" kern="0" dirty="0">
                 <a:solidFill>
                   <a:srgbClr val="8B1A1A"/>
                 </a:solidFill>
@@ -2203,9 +2203,9 @@
                 <a:ea typeface="Source Sans 3" pitchFamily="34" charset="-122"/>
                 <a:cs typeface="Source Sans 3" pitchFamily="34" charset="-120"/>
               </a:rPr>
-              <a:t>Synthesised from 6 independent papers   |   Sept 2026 Review</a:t>
+              <a:t>Synthesised from 6 independent papers   |   September 2026 Review</a:t>
             </a:r>
-            <a:endParaRPr lang="en-US" sz="1050" dirty="0"/>
+            <a:endParaRPr lang="en-US" sz="1400" dirty="0"/>
           </a:p>
         </p:txBody>
       </p:sp>
